--- a/Schools_ML_Track/camp_2026/slides/ML/ML10.pptx
+++ b/Schools_ML_Track/camp_2026/slides/ML/ML10.pptx
@@ -127,7 +127,7 @@
   <p:extLst>
     <p:ext uri="{521415D9-36F7-43E2-AB2F-B90AF26B5E84}">
       <p14:sectionLst xmlns:p14="http://schemas.microsoft.com/office/powerpoint/2010/main">
-        <p14:section name="Opening" id="{235b448b-6df0-c4b0-8ed4-7a8700c43c72}">
+        <p14:section name="Opening" id="{e97b3441-0128-9b1c-d7f4-33c7147507a4}">
           <p14:sldIdLst>
             <p14:sldId id="256"/>
             <p14:sldId id="257"/>
@@ -138,7 +138,7 @@
             <p14:sldId id="262"/>
           </p14:sldIdLst>
         </p14:section>
-        <p14:section name="Block A" id="{330790dc-6be8-981d-c6eb-5f368d0bd1fe}">
+        <p14:section name="Block A" id="{96e24359-97d4-cede-cc89-0b9e8ebfa506}">
           <p14:sldIdLst>
             <p14:sldId id="263"/>
             <p14:sldId id="264"/>
@@ -148,15 +148,15 @@
             <p14:sldId id="269"/>
           </p14:sldIdLst>
         </p14:section>
-        <p14:section name="Break" id="{4befaa19-2e77-273c-6bcf-df253058f127}">
+        <p14:section name="Break" id="{2e3fd877-a576-0fcd-617f-fe203b699b33}">
           <p14:sldIdLst>
             <p14:sldId id="267"/>
           </p14:sldIdLst>
         </p14:section>
-        <p14:section name="Block A" id="{02aae6d8-6bee-96b6-7b48-b9114780fc0a}">
+        <p14:section name="Block A" id="{42fe66c8-680c-00b3-b2be-abcf3126a3ea}">
           <p14:sldIdLst/>
         </p14:section>
-        <p14:section name="Block B" id="{04d25c9a-a24f-ed82-2268-ae99abeaa408}">
+        <p14:section name="Block B" id="{595dfd06-3610-518c-6cf7-e93efd31fd31}">
           <p14:sldIdLst>
             <p14:sldId id="270"/>
             <p14:sldId id="271"/>
@@ -164,7 +164,7 @@
             <p14:sldId id="273"/>
           </p14:sldIdLst>
         </p14:section>
-        <p14:section name="Make and close" id="{d87d3e28-9cb0-7cca-1b31-f8a270931b92}">
+        <p14:section name="Make and close" id="{4e2e0287-5cf2-6841-05d4-8a2ad92bcf34}">
           <p14:sldIdLst>
             <p14:sldId id="274"/>
             <p14:sldId id="275"/>

--- a/Schools_ML_Track/camp_2026/slides/ML/ML10.pptx
+++ b/Schools_ML_Track/camp_2026/slides/ML/ML10.pptx
@@ -127,7 +127,7 @@
   <p:extLst>
     <p:ext uri="{521415D9-36F7-43E2-AB2F-B90AF26B5E84}">
       <p14:sectionLst xmlns:p14="http://schemas.microsoft.com/office/powerpoint/2010/main">
-        <p14:section name="Opening" id="{e97b3441-0128-9b1c-d7f4-33c7147507a4}">
+        <p14:section name="Opening" id="{028f7fa2-a849-caac-4f4e-271c4fbfbad3}">
           <p14:sldIdLst>
             <p14:sldId id="256"/>
             <p14:sldId id="257"/>
@@ -138,7 +138,7 @@
             <p14:sldId id="262"/>
           </p14:sldIdLst>
         </p14:section>
-        <p14:section name="Block A" id="{96e24359-97d4-cede-cc89-0b9e8ebfa506}">
+        <p14:section name="Block A" id="{31781ab7-aa70-a85d-bcfc-34d4a10ab972}">
           <p14:sldIdLst>
             <p14:sldId id="263"/>
             <p14:sldId id="264"/>
@@ -148,15 +148,15 @@
             <p14:sldId id="269"/>
           </p14:sldIdLst>
         </p14:section>
-        <p14:section name="Break" id="{2e3fd877-a576-0fcd-617f-fe203b699b33}">
+        <p14:section name="Break" id="{0c222589-c88e-9ed3-a206-6418385903cb}">
           <p14:sldIdLst>
             <p14:sldId id="267"/>
           </p14:sldIdLst>
         </p14:section>
-        <p14:section name="Block A" id="{42fe66c8-680c-00b3-b2be-abcf3126a3ea}">
+        <p14:section name="Block A" id="{83d1ee47-f1d1-35e8-ee88-b1f1c7d3c80f}">
           <p14:sldIdLst/>
         </p14:section>
-        <p14:section name="Block B" id="{595dfd06-3610-518c-6cf7-e93efd31fd31}">
+        <p14:section name="Block B" id="{713f2ed1-22a9-4956-f09f-f0a3518f34db}">
           <p14:sldIdLst>
             <p14:sldId id="270"/>
             <p14:sldId id="271"/>
@@ -164,7 +164,7 @@
             <p14:sldId id="273"/>
           </p14:sldIdLst>
         </p14:section>
-        <p14:section name="Make and close" id="{4e2e0287-5cf2-6841-05d4-8a2ad92bcf34}">
+        <p14:section name="Make and close" id="{23948381-ac06-db70-5ffc-b83639a30804}">
           <p14:sldIdLst>
             <p14:sldId id="274"/>
             <p14:sldId id="275"/>
@@ -3106,7 +3106,24 @@
                 <a:ea typeface="Lato" pitchFamily="34" charset="-122"/>
                 <a:cs typeface="Lato" pitchFamily="34" charset="-120"/>
               </a:rPr>
-              <a:t>Cleaning without hiding evidence</a:t>
+              <a:t>Cleaning without</a:t>
+            </a:r>
+            <a:endParaRPr lang="en-US" sz="5600" dirty="0"/>
+          </a:p>
+          <a:p>
+            <a:pPr algn="l" indent="0" marL="0">
+              <a:buNone/>
+            </a:pPr>
+            <a:r>
+              <a:rPr lang="en-US" sz="5600" b="1" dirty="0">
+                <a:solidFill>
+                  <a:srgbClr val="FFFFFF"/>
+                </a:solidFill>
+                <a:latin typeface="Lato" pitchFamily="34" charset="0"/>
+                <a:ea typeface="Lato" pitchFamily="34" charset="-122"/>
+                <a:cs typeface="Lato" pitchFamily="34" charset="-120"/>
+              </a:rPr>
+              <a:t>hiding evidence</a:t>
             </a:r>
             <a:endParaRPr lang="en-US" sz="5600" dirty="0"/>
           </a:p>
@@ -4320,11 +4337,11 @@
         <p:spPr>
           <a:xfrm>
             <a:off x="640080" y="1645920"/>
-            <a:ext cx="7223760" cy="4302252"/>
+            <a:ext cx="10881360" cy="3245612"/>
           </a:xfrm>
           <a:prstGeom prst="roundRect">
             <a:avLst>
-              <a:gd name="adj" fmla="val 1700"/>
+              <a:gd name="adj" fmla="val 2254"/>
             </a:avLst>
           </a:prstGeom>
           <a:solidFill>
@@ -4342,7 +4359,7 @@
         <p:spPr>
           <a:xfrm>
             <a:off x="841248" y="1847088"/>
-            <a:ext cx="6821424" cy="3899916"/>
+            <a:ext cx="10479024" cy="2843276"/>
           </a:xfrm>
           <a:prstGeom prst="rect">
             <a:avLst/>
@@ -4356,12 +4373,12 @@
           <a:p>
             <a:pPr algn="l" indent="0" marL="0">
               <a:lnSpc>
-                <a:spcPts val="2340"/>
-              </a:lnSpc>
-              <a:buNone/>
-            </a:pPr>
-            <a:r>
-              <a:rPr lang="en-US" sz="1800" dirty="0">
+                <a:spcPts val="2210"/>
+              </a:lnSpc>
+              <a:buNone/>
+            </a:pPr>
+            <a:r>
+              <a:rPr lang="en-US" sz="1700" dirty="0">
                 <a:solidFill>
                   <a:srgbClr val="FFFFFF"/>
                 </a:solidFill>
@@ -4371,17 +4388,17 @@
               </a:rPr>
               <a:t>log = pd.DataFrame(</a:t>
             </a:r>
-            <a:endParaRPr lang="en-US" sz="1800" dirty="0"/>
-          </a:p>
-          <a:p>
-            <a:pPr algn="l" indent="0" marL="0">
-              <a:lnSpc>
-                <a:spcPts val="2340"/>
-              </a:lnSpc>
-              <a:buNone/>
-            </a:pPr>
-            <a:r>
-              <a:rPr lang="en-US" sz="1800" dirty="0">
+            <a:endParaRPr lang="en-US" sz="1700" dirty="0"/>
+          </a:p>
+          <a:p>
+            <a:pPr algn="l" indent="0" marL="0">
+              <a:lnSpc>
+                <a:spcPts val="2210"/>
+              </a:lnSpc>
+              <a:buNone/>
+            </a:pPr>
+            <a:r>
+              <a:rPr lang="en-US" sz="1700" dirty="0">
                 <a:solidFill>
                   <a:srgbClr val="FFFFFF"/>
                 </a:solidFill>
@@ -4391,17 +4408,17 @@
               </a:rPr>
               <a:t>    {</a:t>
             </a:r>
-            <a:endParaRPr lang="en-US" sz="1800" dirty="0"/>
-          </a:p>
-          <a:p>
-            <a:pPr algn="l" indent="0" marL="0">
-              <a:lnSpc>
-                <a:spcPts val="2340"/>
-              </a:lnSpc>
-              <a:buNone/>
-            </a:pPr>
-            <a:r>
-              <a:rPr lang="en-US" sz="1800" dirty="0">
+            <a:endParaRPr lang="en-US" sz="1700" dirty="0"/>
+          </a:p>
+          <a:p>
+            <a:pPr algn="l" indent="0" marL="0">
+              <a:lnSpc>
+                <a:spcPts val="2210"/>
+              </a:lnSpc>
+              <a:buNone/>
+            </a:pPr>
+            <a:r>
+              <a:rPr lang="en-US" sz="1700" dirty="0">
                 <a:solidFill>
                   <a:srgbClr val="FFFFFF"/>
                 </a:solidFill>
@@ -4413,12 +4430,12 @@
             </a:r>
             <a:pPr algn="l" indent="0" marL="0">
               <a:lnSpc>
-                <a:spcPts val="2340"/>
-              </a:lnSpc>
-              <a:buNone/>
-            </a:pPr>
-            <a:r>
-              <a:rPr lang="en-US" sz="1800" dirty="0">
+                <a:spcPts val="2210"/>
+              </a:lnSpc>
+              <a:buNone/>
+            </a:pPr>
+            <a:r>
+              <a:rPr lang="en-US" sz="1700" dirty="0">
                 <a:solidFill>
                   <a:srgbClr val="E0BE36"/>
                 </a:solidFill>
@@ -4430,12 +4447,12 @@
             </a:r>
             <a:pPr algn="l" indent="0" marL="0">
               <a:lnSpc>
-                <a:spcPts val="2340"/>
-              </a:lnSpc>
-              <a:buNone/>
-            </a:pPr>
-            <a:r>
-              <a:rPr lang="en-US" sz="1800" dirty="0">
+                <a:spcPts val="2210"/>
+              </a:lnSpc>
+              <a:buNone/>
+            </a:pPr>
+            <a:r>
+              <a:rPr lang="en-US" sz="1700" dirty="0">
                 <a:solidFill>
                   <a:srgbClr val="FFFFFF"/>
                 </a:solidFill>
@@ -4445,105 +4462,99 @@
               </a:rPr>
               <a:t>: [</a:t>
             </a:r>
-            <a:endParaRPr lang="en-US" sz="1800" dirty="0"/>
-          </a:p>
-          <a:p>
-            <a:pPr algn="l" indent="0" marL="0">
-              <a:lnSpc>
-                <a:spcPts val="2340"/>
-              </a:lnSpc>
-              <a:buNone/>
-            </a:pPr>
-            <a:r>
-              <a:rPr lang="en-US" sz="1800" dirty="0">
-                <a:solidFill>
-                  <a:srgbClr val="FFFFFF"/>
+            <a:pPr algn="l" indent="0" marL="0">
+              <a:lnSpc>
+                <a:spcPts val="2210"/>
+              </a:lnSpc>
+              <a:buNone/>
+            </a:pPr>
+            <a:r>
+              <a:rPr lang="en-US" sz="1700" dirty="0">
+                <a:solidFill>
+                  <a:srgbClr val="E0BE36"/>
                 </a:solidFill>
                 <a:latin typeface="Courier New" pitchFamily="34" charset="0"/>
                 <a:ea typeface="Courier New" pitchFamily="34" charset="-122"/>
                 <a:cs typeface="Courier New" pitchFamily="34" charset="-120"/>
               </a:rPr>
-              <a:t>            </a:t>
-            </a:r>
-            <a:pPr algn="l" indent="0" marL="0">
-              <a:lnSpc>
-                <a:spcPts val="2340"/>
-              </a:lnSpc>
-              <a:buNone/>
-            </a:pPr>
-            <a:r>
-              <a:rPr lang="en-US" sz="1800" dirty="0">
-                <a:solidFill>
-                  <a:srgbClr val="E0BE36"/>
+              <a:t>"raw rows"</a:t>
+            </a:r>
+            <a:pPr algn="l" indent="0" marL="0">
+              <a:lnSpc>
+                <a:spcPts val="2210"/>
+              </a:lnSpc>
+              <a:buNone/>
+            </a:pPr>
+            <a:r>
+              <a:rPr lang="en-US" sz="1700" dirty="0">
+                <a:solidFill>
+                  <a:srgbClr val="FFFFFF"/>
                 </a:solidFill>
                 <a:latin typeface="Courier New" pitchFamily="34" charset="0"/>
                 <a:ea typeface="Courier New" pitchFamily="34" charset="-122"/>
                 <a:cs typeface="Courier New" pitchFamily="34" charset="-120"/>
               </a:rPr>
-              <a:t>"raw rows"</a:t>
-            </a:r>
-            <a:pPr algn="l" indent="0" marL="0">
-              <a:lnSpc>
-                <a:spcPts val="2340"/>
-              </a:lnSpc>
-              <a:buNone/>
-            </a:pPr>
-            <a:r>
-              <a:rPr lang="en-US" sz="1800" dirty="0">
-                <a:solidFill>
-                  <a:srgbClr val="FFFFFF"/>
+              <a:t>, </a:t>
+            </a:r>
+            <a:pPr algn="l" indent="0" marL="0">
+              <a:lnSpc>
+                <a:spcPts val="2210"/>
+              </a:lnSpc>
+              <a:buNone/>
+            </a:pPr>
+            <a:r>
+              <a:rPr lang="en-US" sz="1700" dirty="0">
+                <a:solidFill>
+                  <a:srgbClr val="E0BE36"/>
                 </a:solidFill>
                 <a:latin typeface="Courier New" pitchFamily="34" charset="0"/>
                 <a:ea typeface="Courier New" pitchFamily="34" charset="-122"/>
                 <a:cs typeface="Courier New" pitchFamily="34" charset="-120"/>
               </a:rPr>
-              <a:t>, </a:t>
-            </a:r>
-            <a:pPr algn="l" indent="0" marL="0">
-              <a:lnSpc>
-                <a:spcPts val="2340"/>
-              </a:lnSpc>
-              <a:buNone/>
-            </a:pPr>
-            <a:r>
-              <a:rPr lang="en-US" sz="1800" dirty="0">
-                <a:solidFill>
-                  <a:srgbClr val="E0BE36"/>
+              <a:t>"duplicate removed"</a:t>
+            </a:r>
+            <a:pPr algn="l" indent="0" marL="0">
+              <a:lnSpc>
+                <a:spcPts val="2210"/>
+              </a:lnSpc>
+              <a:buNone/>
+            </a:pPr>
+            <a:r>
+              <a:rPr lang="en-US" sz="1700" dirty="0">
+                <a:solidFill>
+                  <a:srgbClr val="FFFFFF"/>
                 </a:solidFill>
                 <a:latin typeface="Courier New" pitchFamily="34" charset="0"/>
                 <a:ea typeface="Courier New" pitchFamily="34" charset="-122"/>
                 <a:cs typeface="Courier New" pitchFamily="34" charset="-120"/>
               </a:rPr>
-              <a:t>"duplicate removed"</a:t>
-            </a:r>
-            <a:pPr algn="l" indent="0" marL="0">
-              <a:lnSpc>
-                <a:spcPts val="2340"/>
-              </a:lnSpc>
-              <a:buNone/>
-            </a:pPr>
-            <a:r>
-              <a:rPr lang="en-US" sz="1800" dirty="0">
-                <a:solidFill>
-                  <a:srgbClr val="FFFFFF"/>
+              <a:t>, </a:t>
+            </a:r>
+            <a:pPr algn="l" indent="0" marL="0">
+              <a:lnSpc>
+                <a:spcPts val="2210"/>
+              </a:lnSpc>
+              <a:buNone/>
+            </a:pPr>
+            <a:r>
+              <a:rPr lang="en-US" sz="1700" dirty="0">
+                <a:solidFill>
+                  <a:srgbClr val="E0BE36"/>
                 </a:solidFill>
                 <a:latin typeface="Courier New" pitchFamily="34" charset="0"/>
                 <a:ea typeface="Courier New" pitchFamily="34" charset="-122"/>
                 <a:cs typeface="Courier New" pitchFamily="34" charset="-120"/>
               </a:rPr>
-              <a:t>,</a:t>
-            </a:r>
-            <a:endParaRPr lang="en-US" sz="1800" dirty="0"/>
-          </a:p>
-          <a:p>
-            <a:pPr algn="l" indent="0" marL="0">
-              <a:lnSpc>
-                <a:spcPts val="2340"/>
-              </a:lnSpc>
-              <a:buNone/>
-            </a:pPr>
-            <a:r>
-              <a:rPr lang="en-US" sz="1800" dirty="0">
+              <a:t>"price still missing"</a:t>
+            </a:r>
+            <a:pPr algn="l" indent="0" marL="0">
+              <a:lnSpc>
+                <a:spcPts val="2210"/>
+              </a:lnSpc>
+              <a:buNone/>
+            </a:pPr>
+            <a:r>
+              <a:rPr lang="en-US" sz="1700" dirty="0">
                 <a:solidFill>
                   <a:srgbClr val="FFFFFF"/>
                 </a:solidFill>
@@ -4551,56 +4562,53 @@
                 <a:ea typeface="Courier New" pitchFamily="34" charset="-122"/>
                 <a:cs typeface="Courier New" pitchFamily="34" charset="-120"/>
               </a:rPr>
-              <a:t>            </a:t>
-            </a:r>
-            <a:pPr algn="l" indent="0" marL="0">
-              <a:lnSpc>
-                <a:spcPts val="2340"/>
-              </a:lnSpc>
-              <a:buNone/>
-            </a:pPr>
-            <a:r>
-              <a:rPr lang="en-US" sz="1800" dirty="0">
-                <a:solidFill>
-                  <a:srgbClr val="E0BE36"/>
+              <a:t>],</a:t>
+            </a:r>
+            <a:endParaRPr lang="en-US" sz="1700" dirty="0"/>
+          </a:p>
+          <a:p>
+            <a:pPr algn="l" indent="0" marL="0">
+              <a:lnSpc>
+                <a:spcPts val="2210"/>
+              </a:lnSpc>
+              <a:buNone/>
+            </a:pPr>
+            <a:r>
+              <a:rPr lang="en-US" sz="1700" dirty="0">
+                <a:solidFill>
+                  <a:srgbClr val="FFFFFF"/>
                 </a:solidFill>
                 <a:latin typeface="Courier New" pitchFamily="34" charset="0"/>
                 <a:ea typeface="Courier New" pitchFamily="34" charset="-122"/>
                 <a:cs typeface="Courier New" pitchFamily="34" charset="-120"/>
               </a:rPr>
-              <a:t>"price still missing"</a:t>
-            </a:r>
-            <a:endParaRPr lang="en-US" sz="1800" dirty="0"/>
-          </a:p>
-          <a:p>
-            <a:pPr algn="l" indent="0" marL="0">
-              <a:lnSpc>
-                <a:spcPts val="2340"/>
-              </a:lnSpc>
-              <a:buNone/>
-            </a:pPr>
-            <a:r>
-              <a:rPr lang="en-US" sz="1800" dirty="0">
-                <a:solidFill>
-                  <a:srgbClr val="FFFFFF"/>
+              <a:t>        </a:t>
+            </a:r>
+            <a:pPr algn="l" indent="0" marL="0">
+              <a:lnSpc>
+                <a:spcPts val="2210"/>
+              </a:lnSpc>
+              <a:buNone/>
+            </a:pPr>
+            <a:r>
+              <a:rPr lang="en-US" sz="1700" dirty="0">
+                <a:solidFill>
+                  <a:srgbClr val="E0BE36"/>
                 </a:solidFill>
                 <a:latin typeface="Courier New" pitchFamily="34" charset="0"/>
                 <a:ea typeface="Courier New" pitchFamily="34" charset="-122"/>
                 <a:cs typeface="Courier New" pitchFamily="34" charset="-120"/>
               </a:rPr>
-              <a:t>        ],</a:t>
-            </a:r>
-            <a:endParaRPr lang="en-US" sz="1800" dirty="0"/>
-          </a:p>
-          <a:p>
-            <a:pPr algn="l" indent="0" marL="0">
-              <a:lnSpc>
-                <a:spcPts val="2340"/>
-              </a:lnSpc>
-              <a:buNone/>
-            </a:pPr>
-            <a:r>
-              <a:rPr lang="en-US" sz="1800" dirty="0">
+              <a:t>"count"</a:t>
+            </a:r>
+            <a:pPr algn="l" indent="0" marL="0">
+              <a:lnSpc>
+                <a:spcPts val="2210"/>
+              </a:lnSpc>
+              <a:buNone/>
+            </a:pPr>
+            <a:r>
+              <a:rPr lang="en-US" sz="1700" dirty="0">
                 <a:solidFill>
                   <a:srgbClr val="FFFFFF"/>
                 </a:solidFill>
@@ -4608,33 +4616,39 @@
                 <a:ea typeface="Courier New" pitchFamily="34" charset="-122"/>
                 <a:cs typeface="Courier New" pitchFamily="34" charset="-120"/>
               </a:rPr>
-              <a:t>        </a:t>
-            </a:r>
-            <a:pPr algn="l" indent="0" marL="0">
-              <a:lnSpc>
-                <a:spcPts val="2340"/>
-              </a:lnSpc>
-              <a:buNone/>
-            </a:pPr>
-            <a:r>
-              <a:rPr lang="en-US" sz="1800" dirty="0">
-                <a:solidFill>
-                  <a:srgbClr val="E0BE36"/>
+              <a:t>: [4, 1, 1]</a:t>
+            </a:r>
+            <a:endParaRPr lang="en-US" sz="1700" dirty="0"/>
+          </a:p>
+          <a:p>
+            <a:pPr algn="l" indent="0" marL="0">
+              <a:lnSpc>
+                <a:spcPts val="2210"/>
+              </a:lnSpc>
+              <a:buNone/>
+            </a:pPr>
+            <a:r>
+              <a:rPr lang="en-US" sz="1700" dirty="0">
+                <a:solidFill>
+                  <a:srgbClr val="FFFFFF"/>
                 </a:solidFill>
                 <a:latin typeface="Courier New" pitchFamily="34" charset="0"/>
                 <a:ea typeface="Courier New" pitchFamily="34" charset="-122"/>
                 <a:cs typeface="Courier New" pitchFamily="34" charset="-120"/>
               </a:rPr>
-              <a:t>"count"</a:t>
-            </a:r>
-            <a:pPr algn="l" indent="0" marL="0">
-              <a:lnSpc>
-                <a:spcPts val="2340"/>
-              </a:lnSpc>
-              <a:buNone/>
-            </a:pPr>
-            <a:r>
-              <a:rPr lang="en-US" sz="1800" dirty="0">
+              <a:t>    }</a:t>
+            </a:r>
+            <a:endParaRPr lang="en-US" sz="1700" dirty="0"/>
+          </a:p>
+          <a:p>
+            <a:pPr algn="l" indent="0" marL="0">
+              <a:lnSpc>
+                <a:spcPts val="2210"/>
+              </a:lnSpc>
+              <a:buNone/>
+            </a:pPr>
+            <a:r>
+              <a:rPr lang="en-US" sz="1700" dirty="0">
                 <a:solidFill>
                   <a:srgbClr val="FFFFFF"/>
                 </a:solidFill>
@@ -4642,19 +4656,19 @@
                 <a:ea typeface="Courier New" pitchFamily="34" charset="-122"/>
                 <a:cs typeface="Courier New" pitchFamily="34" charset="-120"/>
               </a:rPr>
-              <a:t>: [4, 1, 1]</a:t>
-            </a:r>
-            <a:endParaRPr lang="en-US" sz="1800" dirty="0"/>
-          </a:p>
-          <a:p>
-            <a:pPr algn="l" indent="0" marL="0">
-              <a:lnSpc>
-                <a:spcPts val="2340"/>
-              </a:lnSpc>
-              <a:buNone/>
-            </a:pPr>
-            <a:r>
-              <a:rPr lang="en-US" sz="1800" dirty="0">
+              <a:t>)</a:t>
+            </a:r>
+            <a:endParaRPr lang="en-US" sz="1700" dirty="0"/>
+          </a:p>
+          <a:p>
+            <a:pPr algn="l" indent="0" marL="0">
+              <a:lnSpc>
+                <a:spcPts val="2210"/>
+              </a:lnSpc>
+              <a:buNone/>
+            </a:pPr>
+            <a:r>
+              <a:rPr lang="en-US" sz="1700" dirty="0">
                 <a:solidFill>
                   <a:srgbClr val="FFFFFF"/>
                 </a:solidFill>
@@ -4662,39 +4676,33 @@
                 <a:ea typeface="Courier New" pitchFamily="34" charset="-122"/>
                 <a:cs typeface="Courier New" pitchFamily="34" charset="-120"/>
               </a:rPr>
-              <a:t>    }</a:t>
-            </a:r>
-            <a:endParaRPr lang="en-US" sz="1800" dirty="0"/>
-          </a:p>
-          <a:p>
-            <a:pPr algn="l" indent="0" marL="0">
-              <a:lnSpc>
-                <a:spcPts val="2340"/>
-              </a:lnSpc>
-              <a:buNone/>
-            </a:pPr>
-            <a:r>
-              <a:rPr lang="en-US" sz="1800" dirty="0">
-                <a:solidFill>
-                  <a:srgbClr val="FFFFFF"/>
+              <a:t>log.to_csv(</a:t>
+            </a:r>
+            <a:pPr algn="l" indent="0" marL="0">
+              <a:lnSpc>
+                <a:spcPts val="2210"/>
+              </a:lnSpc>
+              <a:buNone/>
+            </a:pPr>
+            <a:r>
+              <a:rPr lang="en-US" sz="1700" dirty="0">
+                <a:solidFill>
+                  <a:srgbClr val="E0BE36"/>
                 </a:solidFill>
                 <a:latin typeface="Courier New" pitchFamily="34" charset="0"/>
                 <a:ea typeface="Courier New" pitchFamily="34" charset="-122"/>
                 <a:cs typeface="Courier New" pitchFamily="34" charset="-120"/>
               </a:rPr>
-              <a:t>)</a:t>
-            </a:r>
-            <a:endParaRPr lang="en-US" sz="1800" dirty="0"/>
-          </a:p>
-          <a:p>
-            <a:pPr algn="l" indent="0" marL="0">
-              <a:lnSpc>
-                <a:spcPts val="2340"/>
-              </a:lnSpc>
-              <a:buNone/>
-            </a:pPr>
-            <a:r>
-              <a:rPr lang="en-US" sz="1800" dirty="0">
+              <a:t>"cleaning_log.csv"</a:t>
+            </a:r>
+            <a:pPr algn="l" indent="0" marL="0">
+              <a:lnSpc>
+                <a:spcPts val="2210"/>
+              </a:lnSpc>
+              <a:buNone/>
+            </a:pPr>
+            <a:r>
+              <a:rPr lang="en-US" sz="1700" dirty="0">
                 <a:solidFill>
                   <a:srgbClr val="FFFFFF"/>
                 </a:solidFill>
@@ -4702,33 +4710,33 @@
                 <a:ea typeface="Courier New" pitchFamily="34" charset="-122"/>
                 <a:cs typeface="Courier New" pitchFamily="34" charset="-120"/>
               </a:rPr>
-              <a:t>log.to_csv(</a:t>
-            </a:r>
-            <a:pPr algn="l" indent="0" marL="0">
-              <a:lnSpc>
-                <a:spcPts val="2340"/>
-              </a:lnSpc>
-              <a:buNone/>
-            </a:pPr>
-            <a:r>
-              <a:rPr lang="en-US" sz="1800" dirty="0">
-                <a:solidFill>
-                  <a:srgbClr val="E0BE36"/>
+              <a:t>, index=</a:t>
+            </a:r>
+            <a:pPr algn="l" indent="0" marL="0">
+              <a:lnSpc>
+                <a:spcPts val="2210"/>
+              </a:lnSpc>
+              <a:buNone/>
+            </a:pPr>
+            <a:r>
+              <a:rPr lang="en-US" sz="1700" b="1" dirty="0">
+                <a:solidFill>
+                  <a:srgbClr val="FFFFFF"/>
                 </a:solidFill>
                 <a:latin typeface="Courier New" pitchFamily="34" charset="0"/>
                 <a:ea typeface="Courier New" pitchFamily="34" charset="-122"/>
                 <a:cs typeface="Courier New" pitchFamily="34" charset="-120"/>
               </a:rPr>
-              <a:t>"cleaning_log.csv"</a:t>
-            </a:r>
-            <a:pPr algn="l" indent="0" marL="0">
-              <a:lnSpc>
-                <a:spcPts val="2340"/>
-              </a:lnSpc>
-              <a:buNone/>
-            </a:pPr>
-            <a:r>
-              <a:rPr lang="en-US" sz="1800" dirty="0">
+              <a:t>False</a:t>
+            </a:r>
+            <a:pPr algn="l" indent="0" marL="0">
+              <a:lnSpc>
+                <a:spcPts val="2210"/>
+              </a:lnSpc>
+              <a:buNone/>
+            </a:pPr>
+            <a:r>
+              <a:rPr lang="en-US" sz="1700" dirty="0">
                 <a:solidFill>
                   <a:srgbClr val="FFFFFF"/>
                 </a:solidFill>
@@ -4736,16 +4744,19 @@
                 <a:ea typeface="Courier New" pitchFamily="34" charset="-122"/>
                 <a:cs typeface="Courier New" pitchFamily="34" charset="-120"/>
               </a:rPr>
-              <a:t>, index=</a:t>
-            </a:r>
-            <a:pPr algn="l" indent="0" marL="0">
-              <a:lnSpc>
-                <a:spcPts val="2340"/>
-              </a:lnSpc>
-              <a:buNone/>
-            </a:pPr>
-            <a:r>
-              <a:rPr lang="en-US" sz="1800" b="1" dirty="0">
+              <a:t>)</a:t>
+            </a:r>
+            <a:endParaRPr lang="en-US" sz="1700" dirty="0"/>
+          </a:p>
+          <a:p>
+            <a:pPr algn="l" indent="0" marL="0">
+              <a:lnSpc>
+                <a:spcPts val="2210"/>
+              </a:lnSpc>
+              <a:buNone/>
+            </a:pPr>
+            <a:r>
+              <a:rPr lang="en-US" sz="1700" dirty="0">
                 <a:solidFill>
                   <a:srgbClr val="FFFFFF"/>
                 </a:solidFill>
@@ -4753,36 +4764,33 @@
                 <a:ea typeface="Courier New" pitchFamily="34" charset="-122"/>
                 <a:cs typeface="Courier New" pitchFamily="34" charset="-120"/>
               </a:rPr>
-              <a:t>False</a:t>
-            </a:r>
-            <a:pPr algn="l" indent="0" marL="0">
-              <a:lnSpc>
-                <a:spcPts val="2340"/>
-              </a:lnSpc>
-              <a:buNone/>
-            </a:pPr>
-            <a:r>
-              <a:rPr lang="en-US" sz="1800" dirty="0">
-                <a:solidFill>
-                  <a:srgbClr val="FFFFFF"/>
+              <a:t>log_back = pd.read_csv(</a:t>
+            </a:r>
+            <a:pPr algn="l" indent="0" marL="0">
+              <a:lnSpc>
+                <a:spcPts val="2210"/>
+              </a:lnSpc>
+              <a:buNone/>
+            </a:pPr>
+            <a:r>
+              <a:rPr lang="en-US" sz="1700" dirty="0">
+                <a:solidFill>
+                  <a:srgbClr val="E0BE36"/>
                 </a:solidFill>
                 <a:latin typeface="Courier New" pitchFamily="34" charset="0"/>
                 <a:ea typeface="Courier New" pitchFamily="34" charset="-122"/>
                 <a:cs typeface="Courier New" pitchFamily="34" charset="-120"/>
               </a:rPr>
-              <a:t>)</a:t>
-            </a:r>
-            <a:endParaRPr lang="en-US" sz="1800" dirty="0"/>
-          </a:p>
-          <a:p>
-            <a:pPr algn="l" indent="0" marL="0">
-              <a:lnSpc>
-                <a:spcPts val="2340"/>
-              </a:lnSpc>
-              <a:buNone/>
-            </a:pPr>
-            <a:r>
-              <a:rPr lang="en-US" sz="1800" dirty="0">
+              <a:t>"cleaning_log.csv"</a:t>
+            </a:r>
+            <a:pPr algn="l" indent="0" marL="0">
+              <a:lnSpc>
+                <a:spcPts val="2210"/>
+              </a:lnSpc>
+              <a:buNone/>
+            </a:pPr>
+            <a:r>
+              <a:rPr lang="en-US" sz="1700" dirty="0">
                 <a:solidFill>
                   <a:srgbClr val="FFFFFF"/>
                 </a:solidFill>
@@ -4790,33 +4798,39 @@
                 <a:ea typeface="Courier New" pitchFamily="34" charset="-122"/>
                 <a:cs typeface="Courier New" pitchFamily="34" charset="-120"/>
               </a:rPr>
-              <a:t>log_back = pd.read_csv(</a:t>
-            </a:r>
-            <a:pPr algn="l" indent="0" marL="0">
-              <a:lnSpc>
-                <a:spcPts val="2340"/>
-              </a:lnSpc>
-              <a:buNone/>
-            </a:pPr>
-            <a:r>
-              <a:rPr lang="en-US" sz="1800" dirty="0">
-                <a:solidFill>
-                  <a:srgbClr val="E0BE36"/>
+              <a:t>)</a:t>
+            </a:r>
+            <a:endParaRPr lang="en-US" sz="1700" dirty="0"/>
+          </a:p>
+          <a:p>
+            <a:pPr algn="l" indent="0" marL="0">
+              <a:lnSpc>
+                <a:spcPts val="2210"/>
+              </a:lnSpc>
+              <a:buNone/>
+            </a:pPr>
+            <a:r>
+              <a:rPr lang="en-US" sz="1700" dirty="0">
+                <a:solidFill>
+                  <a:srgbClr val="FFFFFF"/>
                 </a:solidFill>
                 <a:latin typeface="Courier New" pitchFamily="34" charset="0"/>
                 <a:ea typeface="Courier New" pitchFamily="34" charset="-122"/>
                 <a:cs typeface="Courier New" pitchFamily="34" charset="-120"/>
               </a:rPr>
-              <a:t>"cleaning_log.csv"</a:t>
-            </a:r>
-            <a:pPr algn="l" indent="0" marL="0">
-              <a:lnSpc>
-                <a:spcPts val="2340"/>
-              </a:lnSpc>
-              <a:buNone/>
-            </a:pPr>
-            <a:r>
-              <a:rPr lang="en-US" sz="1800" dirty="0">
+              <a:t>print(log_back)</a:t>
+            </a:r>
+            <a:endParaRPr lang="en-US" sz="1700" dirty="0"/>
+          </a:p>
+          <a:p>
+            <a:pPr algn="l" indent="0" marL="0">
+              <a:lnSpc>
+                <a:spcPts val="2210"/>
+              </a:lnSpc>
+              <a:buNone/>
+            </a:pPr>
+            <a:r>
+              <a:rPr lang="en-US" sz="1700" dirty="0">
                 <a:solidFill>
                   <a:srgbClr val="FFFFFF"/>
                 </a:solidFill>
@@ -4824,49 +4838,9 @@
                 <a:ea typeface="Courier New" pitchFamily="34" charset="-122"/>
                 <a:cs typeface="Courier New" pitchFamily="34" charset="-120"/>
               </a:rPr>
-              <a:t>)</a:t>
-            </a:r>
-            <a:endParaRPr lang="en-US" sz="1800" dirty="0"/>
-          </a:p>
-          <a:p>
-            <a:pPr algn="l" indent="0" marL="0">
-              <a:lnSpc>
-                <a:spcPts val="2340"/>
-              </a:lnSpc>
-              <a:buNone/>
-            </a:pPr>
-            <a:r>
-              <a:rPr lang="en-US" sz="1800" dirty="0">
-                <a:solidFill>
-                  <a:srgbClr val="FFFFFF"/>
-                </a:solidFill>
-                <a:latin typeface="Courier New" pitchFamily="34" charset="0"/>
-                <a:ea typeface="Courier New" pitchFamily="34" charset="-122"/>
-                <a:cs typeface="Courier New" pitchFamily="34" charset="-120"/>
-              </a:rPr>
-              <a:t>print(log_back)</a:t>
-            </a:r>
-            <a:endParaRPr lang="en-US" sz="1800" dirty="0"/>
-          </a:p>
-          <a:p>
-            <a:pPr algn="l" indent="0" marL="0">
-              <a:lnSpc>
-                <a:spcPts val="2340"/>
-              </a:lnSpc>
-              <a:buNone/>
-            </a:pPr>
-            <a:r>
-              <a:rPr lang="en-US" sz="1800" dirty="0">
-                <a:solidFill>
-                  <a:srgbClr val="FFFFFF"/>
-                </a:solidFill>
-                <a:latin typeface="Courier New" pitchFamily="34" charset="0"/>
-                <a:ea typeface="Courier New" pitchFamily="34" charset="-122"/>
-                <a:cs typeface="Courier New" pitchFamily="34" charset="-120"/>
-              </a:rPr>
               <a:t>print(log_back.shape)</a:t>
             </a:r>
-            <a:endParaRPr lang="en-US" sz="1800" dirty="0"/>
+            <a:endParaRPr lang="en-US" sz="1700" dirty="0"/>
           </a:p>
         </p:txBody>
       </p:sp>
@@ -4878,8 +4852,8 @@
         </p:nvSpPr>
         <p:spPr>
           <a:xfrm>
-            <a:off x="8138160" y="1737360"/>
-            <a:ext cx="3383280" cy="2560320"/>
+            <a:off x="640080" y="5074412"/>
+            <a:ext cx="8046720" cy="1189228"/>
           </a:xfrm>
           <a:prstGeom prst="rect">
             <a:avLst/>
@@ -4893,15 +4867,15 @@
           <a:p>
             <a:pPr algn="l" indent="0" marL="0">
               <a:lnSpc>
-                <a:spcPts val="2880"/>
+                <a:spcPts val="2640"/>
               </a:lnSpc>
               <a:spcAft>
-                <a:spcPts val="2160"/>
+                <a:spcPts val="1010"/>
               </a:spcAft>
               <a:buNone/>
             </a:pPr>
             <a:r>
-              <a:rPr lang="en-US" sz="2400" dirty="0">
+              <a:rPr lang="en-US" sz="2200" dirty="0">
                 <a:solidFill>
                   <a:srgbClr val="111111"/>
                 </a:solidFill>
@@ -4911,20 +4885,20 @@
               </a:rPr>
               <a:t>Predict how many rows and columns the saved log has after you read it back.</a:t>
             </a:r>
-            <a:endParaRPr lang="en-US" sz="2400" dirty="0"/>
-          </a:p>
-          <a:p>
-            <a:pPr algn="l" indent="0" marL="0">
-              <a:lnSpc>
-                <a:spcPts val="2880"/>
+            <a:endParaRPr lang="en-US" sz="2200" dirty="0"/>
+          </a:p>
+          <a:p>
+            <a:pPr algn="l" indent="0" marL="0">
+              <a:lnSpc>
+                <a:spcPts val="2640"/>
               </a:lnSpc>
               <a:spcAft>
-                <a:spcPts val="2160"/>
+                <a:spcPts val="1010"/>
               </a:spcAft>
               <a:buNone/>
             </a:pPr>
             <a:r>
-              <a:rPr lang="en-US" sz="2400" dirty="0">
+              <a:rPr lang="en-US" sz="2200" dirty="0">
                 <a:solidFill>
                   <a:srgbClr val="111111"/>
                 </a:solidFill>
@@ -4934,13 +4908,13 @@
               </a:rPr>
               <a:t>Write your guess on paper before we run it.</a:t>
             </a:r>
-            <a:endParaRPr lang="en-US" sz="2400" dirty="0"/>
+            <a:endParaRPr lang="en-US" sz="2200" dirty="0"/>
           </a:p>
         </p:txBody>
       </p:sp>
       <p:pic>
         <p:nvPicPr>
-          <p:cNvPr id="6" name="Image 0" descr="A page and a pen: write your guess first">    </p:cNvPr>
+          <p:cNvPr id="6" name="Image 0" descr="A page and a pen">    </p:cNvPr>
           <p:cNvPicPr>
             <a:picLocks noChangeAspect="1"/>
           </p:cNvPicPr>
@@ -4954,8 +4928,8 @@
         </p:blipFill>
         <p:spPr>
           <a:xfrm>
-            <a:off x="9013371" y="4343400"/>
-            <a:ext cx="2090057" cy="1828800"/>
+            <a:off x="10241280" y="5076698"/>
+            <a:ext cx="1188720" cy="1046988"/>
           </a:xfrm>
           <a:prstGeom prst="rect">
             <a:avLst/>
@@ -5888,15 +5862,15 @@
           <a:p>
             <a:pPr algn="l" indent="0" marL="0">
               <a:lnSpc>
-                <a:spcPts val="3480"/>
+                <a:spcPts val="3360"/>
               </a:lnSpc>
               <a:spcAft>
-                <a:spcPts val="2520"/>
+                <a:spcPts val="2020"/>
               </a:spcAft>
               <a:buNone/>
             </a:pPr>
             <a:r>
-              <a:rPr lang="en-US" sz="2900" dirty="0">
+              <a:rPr lang="en-US" sz="2800" dirty="0">
                 <a:solidFill>
                   <a:srgbClr val="111111"/>
                 </a:solidFill>
@@ -5904,22 +5878,22 @@
                 <a:ea typeface="Lato" pitchFamily="34" charset="-122"/>
                 <a:cs typeface="Lato" pitchFamily="34" charset="-120"/>
               </a:rPr>
-              <a:t>Write a cleaning log for this table: four raw rows, one removed duplicate and one remaining missing price. Save it as my_log.csv and read it back. Explain why replacing the missing price with 0 would change its meaning.</a:t>
-            </a:r>
-            <a:endParaRPr lang="en-US" sz="2900" dirty="0"/>
-          </a:p>
-          <a:p>
-            <a:pPr algn="l" indent="0" marL="0">
-              <a:lnSpc>
-                <a:spcPts val="3480"/>
+              <a:t>Write a cleaning log for this table: four raw rows, one removed duplicate and one remaining missing price.</a:t>
+            </a:r>
+            <a:endParaRPr lang="en-US" sz="2800" dirty="0"/>
+          </a:p>
+          <a:p>
+            <a:pPr algn="l" indent="0" marL="0">
+              <a:lnSpc>
+                <a:spcPts val="3360"/>
               </a:lnSpc>
               <a:spcAft>
-                <a:spcPts val="2520"/>
+                <a:spcPts val="2020"/>
               </a:spcAft>
               <a:buNone/>
             </a:pPr>
             <a:r>
-              <a:rPr lang="en-US" sz="2900" dirty="0">
+              <a:rPr lang="en-US" sz="2800" dirty="0">
                 <a:solidFill>
                   <a:srgbClr val="111111"/>
                 </a:solidFill>
@@ -5927,9 +5901,55 @@
                 <a:ea typeface="Lato" pitchFamily="34" charset="-122"/>
                 <a:cs typeface="Lato" pitchFamily="34" charset="-120"/>
               </a:rPr>
-              <a:t>Save it as ML10. Write two sentences: what you changed and how you checked it.</a:t>
-            </a:r>
-            <a:endParaRPr lang="en-US" sz="2900" dirty="0"/>
+              <a:t>Save it as my_log.csv and read it back.</a:t>
+            </a:r>
+            <a:endParaRPr lang="en-US" sz="2800" dirty="0"/>
+          </a:p>
+          <a:p>
+            <a:pPr algn="l" indent="0" marL="0">
+              <a:lnSpc>
+                <a:spcPts val="3360"/>
+              </a:lnSpc>
+              <a:spcAft>
+                <a:spcPts val="2020"/>
+              </a:spcAft>
+              <a:buNone/>
+            </a:pPr>
+            <a:r>
+              <a:rPr lang="en-US" sz="2800" dirty="0">
+                <a:solidFill>
+                  <a:srgbClr val="111111"/>
+                </a:solidFill>
+                <a:latin typeface="Lato" pitchFamily="34" charset="0"/>
+                <a:ea typeface="Lato" pitchFamily="34" charset="-122"/>
+                <a:cs typeface="Lato" pitchFamily="34" charset="-120"/>
+              </a:rPr>
+              <a:t>Explain why replacing the missing price with 0 would change its meaning.</a:t>
+            </a:r>
+            <a:endParaRPr lang="en-US" sz="2800" dirty="0"/>
+          </a:p>
+          <a:p>
+            <a:pPr algn="l" indent="0" marL="0">
+              <a:lnSpc>
+                <a:spcPts val="3360"/>
+              </a:lnSpc>
+              <a:spcAft>
+                <a:spcPts val="2020"/>
+              </a:spcAft>
+              <a:buNone/>
+            </a:pPr>
+            <a:r>
+              <a:rPr lang="en-US" sz="2800" dirty="0">
+                <a:solidFill>
+                  <a:srgbClr val="111111"/>
+                </a:solidFill>
+                <a:latin typeface="Lato" pitchFamily="34" charset="0"/>
+                <a:ea typeface="Lato" pitchFamily="34" charset="-122"/>
+                <a:cs typeface="Lato" pitchFamily="34" charset="-120"/>
+              </a:rPr>
+              <a:t>Write two sentences: what you changed and how you checked it.</a:t>
+            </a:r>
+            <a:endParaRPr lang="en-US" sz="2800" dirty="0"/>
           </a:p>
         </p:txBody>
       </p:sp>
@@ -8777,11 +8797,11 @@
         <p:spPr>
           <a:xfrm>
             <a:off x="640080" y="1645920"/>
-            <a:ext cx="10881360" cy="3383280"/>
+            <a:ext cx="10881360" cy="2403602"/>
           </a:xfrm>
           <a:prstGeom prst="roundRect">
             <a:avLst>
-              <a:gd name="adj" fmla="val 2162"/>
+              <a:gd name="adj" fmla="val 3043"/>
             </a:avLst>
           </a:prstGeom>
           <a:solidFill>
@@ -8799,7 +8819,7 @@
         <p:spPr>
           <a:xfrm>
             <a:off x="841248" y="1847088"/>
-            <a:ext cx="10479024" cy="2980944"/>
+            <a:ext cx="10479024" cy="2001266"/>
           </a:xfrm>
           <a:prstGeom prst="rect">
             <a:avLst/>
@@ -8813,12 +8833,12 @@
           <a:p>
             <a:pPr algn="l" indent="0" marL="0">
               <a:lnSpc>
-                <a:spcPts val="2600"/>
-              </a:lnSpc>
-              <a:buNone/>
-            </a:pPr>
-            <a:r>
-              <a:rPr lang="en-US" sz="2000" b="1" dirty="0">
+                <a:spcPts val="2210"/>
+              </a:lnSpc>
+              <a:buNone/>
+            </a:pPr>
+            <a:r>
+              <a:rPr lang="en-US" sz="1700" b="1" dirty="0">
                 <a:solidFill>
                   <a:srgbClr val="FFFFFF"/>
                 </a:solidFill>
@@ -8830,12 +8850,12 @@
             </a:r>
             <a:pPr algn="l" indent="0" marL="0">
               <a:lnSpc>
-                <a:spcPts val="2600"/>
-              </a:lnSpc>
-              <a:buNone/>
-            </a:pPr>
-            <a:r>
-              <a:rPr lang="en-US" sz="2000" dirty="0">
+                <a:spcPts val="2210"/>
+              </a:lnSpc>
+              <a:buNone/>
+            </a:pPr>
+            <a:r>
+              <a:rPr lang="en-US" sz="1700" dirty="0">
                 <a:solidFill>
                   <a:srgbClr val="FFFFFF"/>
                 </a:solidFill>
@@ -8847,12 +8867,12 @@
             </a:r>
             <a:pPr algn="l" indent="0" marL="0">
               <a:lnSpc>
-                <a:spcPts val="2600"/>
-              </a:lnSpc>
-              <a:buNone/>
-            </a:pPr>
-            <a:r>
-              <a:rPr lang="en-US" sz="2000" b="1" dirty="0">
+                <a:spcPts val="2210"/>
+              </a:lnSpc>
+              <a:buNone/>
+            </a:pPr>
+            <a:r>
+              <a:rPr lang="en-US" sz="1700" b="1" dirty="0">
                 <a:solidFill>
                   <a:srgbClr val="FFFFFF"/>
                 </a:solidFill>
@@ -8864,12 +8884,12 @@
             </a:r>
             <a:pPr algn="l" indent="0" marL="0">
               <a:lnSpc>
-                <a:spcPts val="2600"/>
-              </a:lnSpc>
-              <a:buNone/>
-            </a:pPr>
-            <a:r>
-              <a:rPr lang="en-US" sz="2000" dirty="0">
+                <a:spcPts val="2210"/>
+              </a:lnSpc>
+              <a:buNone/>
+            </a:pPr>
+            <a:r>
+              <a:rPr lang="en-US" sz="1700" dirty="0">
                 <a:solidFill>
                   <a:srgbClr val="FFFFFF"/>
                 </a:solidFill>
@@ -8879,17 +8899,17 @@
               </a:rPr>
               <a:t> pd</a:t>
             </a:r>
-            <a:endParaRPr lang="en-US" sz="2000" dirty="0"/>
-          </a:p>
-          <a:p>
-            <a:pPr algn="l" indent="0" marL="0">
-              <a:lnSpc>
-                <a:spcPts val="2600"/>
-              </a:lnSpc>
-              <a:buNone/>
-            </a:pPr>
-            <a:r>
-              <a:rPr lang="en-US" sz="2000" dirty="0">
+            <a:endParaRPr lang="en-US" sz="1700" dirty="0"/>
+          </a:p>
+          <a:p>
+            <a:pPr algn="l" indent="0" marL="0">
+              <a:lnSpc>
+                <a:spcPts val="2210"/>
+              </a:lnSpc>
+              <a:buNone/>
+            </a:pPr>
+            <a:r>
+              <a:rPr lang="en-US" sz="1700" dirty="0">
                 <a:solidFill>
                   <a:srgbClr val="FFFFFF"/>
                 </a:solidFill>
@@ -8897,87 +8917,84 @@
                 <a:ea typeface="Courier New" pitchFamily="34" charset="-122"/>
                 <a:cs typeface="Courier New" pitchFamily="34" charset="-120"/>
               </a:rPr>
-              <a:t>raw = pd.DataFrame(</a:t>
-            </a:r>
-            <a:endParaRPr lang="en-US" sz="2000" dirty="0"/>
-          </a:p>
-          <a:p>
-            <a:pPr algn="l" indent="0" marL="0">
-              <a:lnSpc>
-                <a:spcPts val="2600"/>
-              </a:lnSpc>
-              <a:buNone/>
-            </a:pPr>
-            <a:r>
-              <a:rPr lang="en-US" sz="2000" dirty="0">
-                <a:solidFill>
-                  <a:srgbClr val="FFFFFF"/>
+              <a:t>raw = pd.DataFrame({</a:t>
+            </a:r>
+            <a:pPr algn="l" indent="0" marL="0">
+              <a:lnSpc>
+                <a:spcPts val="2210"/>
+              </a:lnSpc>
+              <a:buNone/>
+            </a:pPr>
+            <a:r>
+              <a:rPr lang="en-US" sz="1700" dirty="0">
+                <a:solidFill>
+                  <a:srgbClr val="E0BE36"/>
                 </a:solidFill>
                 <a:latin typeface="Courier New" pitchFamily="34" charset="0"/>
                 <a:ea typeface="Courier New" pitchFamily="34" charset="-122"/>
                 <a:cs typeface="Courier New" pitchFamily="34" charset="-120"/>
               </a:rPr>
-              <a:t>    {</a:t>
-            </a:r>
-            <a:pPr algn="l" indent="0" marL="0">
-              <a:lnSpc>
-                <a:spcPts val="2600"/>
-              </a:lnSpc>
-              <a:buNone/>
-            </a:pPr>
-            <a:r>
-              <a:rPr lang="en-US" sz="2000" dirty="0">
-                <a:solidFill>
-                  <a:srgbClr val="E0BE36"/>
+              <a:t>"id"</a:t>
+            </a:r>
+            <a:pPr algn="l" indent="0" marL="0">
+              <a:lnSpc>
+                <a:spcPts val="2210"/>
+              </a:lnSpc>
+              <a:buNone/>
+            </a:pPr>
+            <a:r>
+              <a:rPr lang="en-US" sz="1700" dirty="0">
+                <a:solidFill>
+                  <a:srgbClr val="FFFFFF"/>
                 </a:solidFill>
                 <a:latin typeface="Courier New" pitchFamily="34" charset="0"/>
                 <a:ea typeface="Courier New" pitchFamily="34" charset="-122"/>
                 <a:cs typeface="Courier New" pitchFamily="34" charset="-120"/>
               </a:rPr>
-              <a:t>"id"</a:t>
-            </a:r>
-            <a:pPr algn="l" indent="0" marL="0">
-              <a:lnSpc>
-                <a:spcPts val="2600"/>
-              </a:lnSpc>
-              <a:buNone/>
-            </a:pPr>
-            <a:r>
-              <a:rPr lang="en-US" sz="2000" dirty="0">
-                <a:solidFill>
-                  <a:srgbClr val="FFFFFF"/>
+              <a:t>: [1, 2, 2, 3], </a:t>
+            </a:r>
+            <a:pPr algn="l" indent="0" marL="0">
+              <a:lnSpc>
+                <a:spcPts val="2210"/>
+              </a:lnSpc>
+              <a:buNone/>
+            </a:pPr>
+            <a:r>
+              <a:rPr lang="en-US" sz="1700" dirty="0">
+                <a:solidFill>
+                  <a:srgbClr val="E0BE36"/>
                 </a:solidFill>
                 <a:latin typeface="Courier New" pitchFamily="34" charset="0"/>
                 <a:ea typeface="Courier New" pitchFamily="34" charset="-122"/>
                 <a:cs typeface="Courier New" pitchFamily="34" charset="-120"/>
               </a:rPr>
-              <a:t>: [1, 2, 2, 3], </a:t>
-            </a:r>
-            <a:pPr algn="l" indent="0" marL="0">
-              <a:lnSpc>
-                <a:spcPts val="2600"/>
-              </a:lnSpc>
-              <a:buNone/>
-            </a:pPr>
-            <a:r>
-              <a:rPr lang="en-US" sz="2000" dirty="0">
-                <a:solidFill>
-                  <a:srgbClr val="E0BE36"/>
+              <a:t>"price"</a:t>
+            </a:r>
+            <a:pPr algn="l" indent="0" marL="0">
+              <a:lnSpc>
+                <a:spcPts val="2210"/>
+              </a:lnSpc>
+              <a:buNone/>
+            </a:pPr>
+            <a:r>
+              <a:rPr lang="en-US" sz="1700" dirty="0">
+                <a:solidFill>
+                  <a:srgbClr val="FFFFFF"/>
                 </a:solidFill>
                 <a:latin typeface="Courier New" pitchFamily="34" charset="0"/>
                 <a:ea typeface="Courier New" pitchFamily="34" charset="-122"/>
                 <a:cs typeface="Courier New" pitchFamily="34" charset="-120"/>
               </a:rPr>
-              <a:t>"price"</a:t>
-            </a:r>
-            <a:pPr algn="l" indent="0" marL="0">
-              <a:lnSpc>
-                <a:spcPts val="2600"/>
-              </a:lnSpc>
-              <a:buNone/>
-            </a:pPr>
-            <a:r>
-              <a:rPr lang="en-US" sz="2000" dirty="0">
+              <a:t>: [1000, </a:t>
+            </a:r>
+            <a:pPr algn="l" indent="0" marL="0">
+              <a:lnSpc>
+                <a:spcPts val="2210"/>
+              </a:lnSpc>
+              <a:buNone/>
+            </a:pPr>
+            <a:r>
+              <a:rPr lang="en-US" sz="1700" b="1" dirty="0">
                 <a:solidFill>
                   <a:srgbClr val="FFFFFF"/>
                 </a:solidFill>
@@ -8985,16 +9002,16 @@
                 <a:ea typeface="Courier New" pitchFamily="34" charset="-122"/>
                 <a:cs typeface="Courier New" pitchFamily="34" charset="-120"/>
               </a:rPr>
-              <a:t>: [1000, </a:t>
-            </a:r>
-            <a:pPr algn="l" indent="0" marL="0">
-              <a:lnSpc>
-                <a:spcPts val="2600"/>
-              </a:lnSpc>
-              <a:buNone/>
-            </a:pPr>
-            <a:r>
-              <a:rPr lang="en-US" sz="2000" b="1" dirty="0">
+              <a:t>None</a:t>
+            </a:r>
+            <a:pPr algn="l" indent="0" marL="0">
+              <a:lnSpc>
+                <a:spcPts val="2210"/>
+              </a:lnSpc>
+              <a:buNone/>
+            </a:pPr>
+            <a:r>
+              <a:rPr lang="en-US" sz="1700" dirty="0">
                 <a:solidFill>
                   <a:srgbClr val="FFFFFF"/>
                 </a:solidFill>
@@ -9002,16 +9019,16 @@
                 <a:ea typeface="Courier New" pitchFamily="34" charset="-122"/>
                 <a:cs typeface="Courier New" pitchFamily="34" charset="-120"/>
               </a:rPr>
-              <a:t>None</a:t>
-            </a:r>
-            <a:pPr algn="l" indent="0" marL="0">
-              <a:lnSpc>
-                <a:spcPts val="2600"/>
-              </a:lnSpc>
-              <a:buNone/>
-            </a:pPr>
-            <a:r>
-              <a:rPr lang="en-US" sz="2000" dirty="0">
+              <a:t>, </a:t>
+            </a:r>
+            <a:pPr algn="l" indent="0" marL="0">
+              <a:lnSpc>
+                <a:spcPts val="2210"/>
+              </a:lnSpc>
+              <a:buNone/>
+            </a:pPr>
+            <a:r>
+              <a:rPr lang="en-US" sz="1700" b="1" dirty="0">
                 <a:solidFill>
                   <a:srgbClr val="FFFFFF"/>
                 </a:solidFill>
@@ -9019,16 +9036,16 @@
                 <a:ea typeface="Courier New" pitchFamily="34" charset="-122"/>
                 <a:cs typeface="Courier New" pitchFamily="34" charset="-120"/>
               </a:rPr>
-              <a:t>, </a:t>
-            </a:r>
-            <a:pPr algn="l" indent="0" marL="0">
-              <a:lnSpc>
-                <a:spcPts val="2600"/>
-              </a:lnSpc>
-              <a:buNone/>
-            </a:pPr>
-            <a:r>
-              <a:rPr lang="en-US" sz="2000" b="1" dirty="0">
+              <a:t>None</a:t>
+            </a:r>
+            <a:pPr algn="l" indent="0" marL="0">
+              <a:lnSpc>
+                <a:spcPts val="2210"/>
+              </a:lnSpc>
+              <a:buNone/>
+            </a:pPr>
+            <a:r>
+              <a:rPr lang="en-US" sz="1700" dirty="0">
                 <a:solidFill>
                   <a:srgbClr val="FFFFFF"/>
                 </a:solidFill>
@@ -9036,16 +9053,19 @@
                 <a:ea typeface="Courier New" pitchFamily="34" charset="-122"/>
                 <a:cs typeface="Courier New" pitchFamily="34" charset="-120"/>
               </a:rPr>
-              <a:t>None</a:t>
-            </a:r>
-            <a:pPr algn="l" indent="0" marL="0">
-              <a:lnSpc>
-                <a:spcPts val="2600"/>
-              </a:lnSpc>
-              <a:buNone/>
-            </a:pPr>
-            <a:r>
-              <a:rPr lang="en-US" sz="2000" dirty="0">
+              <a:t>, 3000]})</a:t>
+            </a:r>
+            <a:endParaRPr lang="en-US" sz="1700" dirty="0"/>
+          </a:p>
+          <a:p>
+            <a:pPr algn="l" indent="0" marL="0">
+              <a:lnSpc>
+                <a:spcPts val="2210"/>
+              </a:lnSpc>
+              <a:buNone/>
+            </a:pPr>
+            <a:r>
+              <a:rPr lang="en-US" sz="1700" dirty="0">
                 <a:solidFill>
                   <a:srgbClr val="FFFFFF"/>
                 </a:solidFill>
@@ -9053,39 +9073,33 @@
                 <a:ea typeface="Courier New" pitchFamily="34" charset="-122"/>
                 <a:cs typeface="Courier New" pitchFamily="34" charset="-120"/>
               </a:rPr>
-              <a:t>, 3000]}</a:t>
-            </a:r>
-            <a:endParaRPr lang="en-US" sz="2000" dirty="0"/>
-          </a:p>
-          <a:p>
-            <a:pPr algn="l" indent="0" marL="0">
-              <a:lnSpc>
-                <a:spcPts val="2600"/>
-              </a:lnSpc>
-              <a:buNone/>
-            </a:pPr>
-            <a:r>
-              <a:rPr lang="en-US" sz="2000" dirty="0">
-                <a:solidFill>
-                  <a:srgbClr val="FFFFFF"/>
+              <a:t>missing = raw[</a:t>
+            </a:r>
+            <a:pPr algn="l" indent="0" marL="0">
+              <a:lnSpc>
+                <a:spcPts val="2210"/>
+              </a:lnSpc>
+              <a:buNone/>
+            </a:pPr>
+            <a:r>
+              <a:rPr lang="en-US" sz="1700" dirty="0">
+                <a:solidFill>
+                  <a:srgbClr val="E0BE36"/>
                 </a:solidFill>
                 <a:latin typeface="Courier New" pitchFamily="34" charset="0"/>
                 <a:ea typeface="Courier New" pitchFamily="34" charset="-122"/>
                 <a:cs typeface="Courier New" pitchFamily="34" charset="-120"/>
               </a:rPr>
-              <a:t>)</a:t>
-            </a:r>
-            <a:endParaRPr lang="en-US" sz="2000" dirty="0"/>
-          </a:p>
-          <a:p>
-            <a:pPr algn="l" indent="0" marL="0">
-              <a:lnSpc>
-                <a:spcPts val="2600"/>
-              </a:lnSpc>
-              <a:buNone/>
-            </a:pPr>
-            <a:r>
-              <a:rPr lang="en-US" sz="2000" dirty="0">
+              <a:t>"price"</a:t>
+            </a:r>
+            <a:pPr algn="l" indent="0" marL="0">
+              <a:lnSpc>
+                <a:spcPts val="2210"/>
+              </a:lnSpc>
+              <a:buNone/>
+            </a:pPr>
+            <a:r>
+              <a:rPr lang="en-US" sz="1700" dirty="0">
                 <a:solidFill>
                   <a:srgbClr val="FFFFFF"/>
                 </a:solidFill>
@@ -9093,33 +9107,39 @@
                 <a:ea typeface="Courier New" pitchFamily="34" charset="-122"/>
                 <a:cs typeface="Courier New" pitchFamily="34" charset="-120"/>
               </a:rPr>
-              <a:t>missing = raw[</a:t>
-            </a:r>
-            <a:pPr algn="l" indent="0" marL="0">
-              <a:lnSpc>
-                <a:spcPts val="2600"/>
-              </a:lnSpc>
-              <a:buNone/>
-            </a:pPr>
-            <a:r>
-              <a:rPr lang="en-US" sz="2000" dirty="0">
-                <a:solidFill>
-                  <a:srgbClr val="E0BE36"/>
+              <a:t>].isna().sum()</a:t>
+            </a:r>
+            <a:endParaRPr lang="en-US" sz="1700" dirty="0"/>
+          </a:p>
+          <a:p>
+            <a:pPr algn="l" indent="0" marL="0">
+              <a:lnSpc>
+                <a:spcPts val="2210"/>
+              </a:lnSpc>
+              <a:buNone/>
+            </a:pPr>
+            <a:r>
+              <a:rPr lang="en-US" sz="1700" dirty="0">
+                <a:solidFill>
+                  <a:srgbClr val="FFFFFF"/>
                 </a:solidFill>
                 <a:latin typeface="Courier New" pitchFamily="34" charset="0"/>
                 <a:ea typeface="Courier New" pitchFamily="34" charset="-122"/>
                 <a:cs typeface="Courier New" pitchFamily="34" charset="-120"/>
               </a:rPr>
-              <a:t>"price"</a:t>
-            </a:r>
-            <a:pPr algn="l" indent="0" marL="0">
-              <a:lnSpc>
-                <a:spcPts val="2600"/>
-              </a:lnSpc>
-              <a:buNone/>
-            </a:pPr>
-            <a:r>
-              <a:rPr lang="en-US" sz="2000" dirty="0">
+              <a:t>dupes = raw.duplicated().sum()</a:t>
+            </a:r>
+            <a:endParaRPr lang="en-US" sz="1700" dirty="0"/>
+          </a:p>
+          <a:p>
+            <a:pPr algn="l" indent="0" marL="0">
+              <a:lnSpc>
+                <a:spcPts val="2210"/>
+              </a:lnSpc>
+              <a:buNone/>
+            </a:pPr>
+            <a:r>
+              <a:rPr lang="en-US" sz="1700" dirty="0">
                 <a:solidFill>
                   <a:srgbClr val="FFFFFF"/>
                 </a:solidFill>
@@ -9127,19 +9147,19 @@
                 <a:ea typeface="Courier New" pitchFamily="34" charset="-122"/>
                 <a:cs typeface="Courier New" pitchFamily="34" charset="-120"/>
               </a:rPr>
-              <a:t>].isna().sum()</a:t>
-            </a:r>
-            <a:endParaRPr lang="en-US" sz="2000" dirty="0"/>
-          </a:p>
-          <a:p>
-            <a:pPr algn="l" indent="0" marL="0">
-              <a:lnSpc>
-                <a:spcPts val="2600"/>
-              </a:lnSpc>
-              <a:buNone/>
-            </a:pPr>
-            <a:r>
-              <a:rPr lang="en-US" sz="2000" dirty="0">
+              <a:t>clean = raw.drop_duplicates().copy()</a:t>
+            </a:r>
+            <a:endParaRPr lang="en-US" sz="1700" dirty="0"/>
+          </a:p>
+          <a:p>
+            <a:pPr algn="l" indent="0" marL="0">
+              <a:lnSpc>
+                <a:spcPts val="2210"/>
+              </a:lnSpc>
+              <a:buNone/>
+            </a:pPr>
+            <a:r>
+              <a:rPr lang="en-US" sz="1700" dirty="0">
                 <a:solidFill>
                   <a:srgbClr val="FFFFFF"/>
                 </a:solidFill>
@@ -9147,19 +9167,19 @@
                 <a:ea typeface="Courier New" pitchFamily="34" charset="-122"/>
                 <a:cs typeface="Courier New" pitchFamily="34" charset="-120"/>
               </a:rPr>
-              <a:t>dupes = raw.duplicated().sum()</a:t>
-            </a:r>
-            <a:endParaRPr lang="en-US" sz="2000" dirty="0"/>
-          </a:p>
-          <a:p>
-            <a:pPr algn="l" indent="0" marL="0">
-              <a:lnSpc>
-                <a:spcPts val="2600"/>
-              </a:lnSpc>
-              <a:buNone/>
-            </a:pPr>
-            <a:r>
-              <a:rPr lang="en-US" sz="2000" dirty="0">
+              <a:t>print(missing, dupes, len(clean))</a:t>
+            </a:r>
+            <a:endParaRPr lang="en-US" sz="1700" dirty="0"/>
+          </a:p>
+          <a:p>
+            <a:pPr algn="l" indent="0" marL="0">
+              <a:lnSpc>
+                <a:spcPts val="2210"/>
+              </a:lnSpc>
+              <a:buNone/>
+            </a:pPr>
+            <a:r>
+              <a:rPr lang="en-US" sz="1700" dirty="0">
                 <a:solidFill>
                   <a:srgbClr val="FFFFFF"/>
                 </a:solidFill>
@@ -9167,39 +9187,33 @@
                 <a:ea typeface="Courier New" pitchFamily="34" charset="-122"/>
                 <a:cs typeface="Courier New" pitchFamily="34" charset="-120"/>
               </a:rPr>
-              <a:t>clean = raw.drop_duplicates().copy()</a:t>
-            </a:r>
-            <a:endParaRPr lang="en-US" sz="2000" dirty="0"/>
-          </a:p>
-          <a:p>
-            <a:pPr algn="l" indent="0" marL="0">
-              <a:lnSpc>
-                <a:spcPts val="2600"/>
-              </a:lnSpc>
-              <a:buNone/>
-            </a:pPr>
-            <a:r>
-              <a:rPr lang="en-US" sz="2000" dirty="0">
-                <a:solidFill>
-                  <a:srgbClr val="FFFFFF"/>
+              <a:t>print(clean[</a:t>
+            </a:r>
+            <a:pPr algn="l" indent="0" marL="0">
+              <a:lnSpc>
+                <a:spcPts val="2210"/>
+              </a:lnSpc>
+              <a:buNone/>
+            </a:pPr>
+            <a:r>
+              <a:rPr lang="en-US" sz="1700" dirty="0">
+                <a:solidFill>
+                  <a:srgbClr val="E0BE36"/>
                 </a:solidFill>
                 <a:latin typeface="Courier New" pitchFamily="34" charset="0"/>
                 <a:ea typeface="Courier New" pitchFamily="34" charset="-122"/>
                 <a:cs typeface="Courier New" pitchFamily="34" charset="-120"/>
               </a:rPr>
-              <a:t>print(missing, dupes, len(clean))</a:t>
-            </a:r>
-            <a:endParaRPr lang="en-US" sz="2000" dirty="0"/>
-          </a:p>
-          <a:p>
-            <a:pPr algn="l" indent="0" marL="0">
-              <a:lnSpc>
-                <a:spcPts val="2600"/>
-              </a:lnSpc>
-              <a:buNone/>
-            </a:pPr>
-            <a:r>
-              <a:rPr lang="en-US" sz="2000" dirty="0">
+              <a:t>"price"</a:t>
+            </a:r>
+            <a:pPr algn="l" indent="0" marL="0">
+              <a:lnSpc>
+                <a:spcPts val="2210"/>
+              </a:lnSpc>
+              <a:buNone/>
+            </a:pPr>
+            <a:r>
+              <a:rPr lang="en-US" sz="1700" dirty="0">
                 <a:solidFill>
                   <a:srgbClr val="FFFFFF"/>
                 </a:solidFill>
@@ -9207,43 +9221,9 @@
                 <a:ea typeface="Courier New" pitchFamily="34" charset="-122"/>
                 <a:cs typeface="Courier New" pitchFamily="34" charset="-120"/>
               </a:rPr>
-              <a:t>print(clean[</a:t>
-            </a:r>
-            <a:pPr algn="l" indent="0" marL="0">
-              <a:lnSpc>
-                <a:spcPts val="2600"/>
-              </a:lnSpc>
-              <a:buNone/>
-            </a:pPr>
-            <a:r>
-              <a:rPr lang="en-US" sz="2000" dirty="0">
-                <a:solidFill>
-                  <a:srgbClr val="E0BE36"/>
-                </a:solidFill>
-                <a:latin typeface="Courier New" pitchFamily="34" charset="0"/>
-                <a:ea typeface="Courier New" pitchFamily="34" charset="-122"/>
-                <a:cs typeface="Courier New" pitchFamily="34" charset="-120"/>
-              </a:rPr>
-              <a:t>"price"</a:t>
-            </a:r>
-            <a:pPr algn="l" indent="0" marL="0">
-              <a:lnSpc>
-                <a:spcPts val="2600"/>
-              </a:lnSpc>
-              <a:buNone/>
-            </a:pPr>
-            <a:r>
-              <a:rPr lang="en-US" sz="2000" dirty="0">
-                <a:solidFill>
-                  <a:srgbClr val="FFFFFF"/>
-                </a:solidFill>
-                <a:latin typeface="Courier New" pitchFamily="34" charset="0"/>
-                <a:ea typeface="Courier New" pitchFamily="34" charset="-122"/>
-                <a:cs typeface="Courier New" pitchFamily="34" charset="-120"/>
-              </a:rPr>
               <a:t>].mean())</a:t>
             </a:r>
-            <a:endParaRPr lang="en-US" sz="2000" dirty="0"/>
+            <a:endParaRPr lang="en-US" sz="1700" dirty="0"/>
           </a:p>
         </p:txBody>
       </p:sp>
@@ -9255,8 +9235,8 @@
         </p:nvSpPr>
         <p:spPr>
           <a:xfrm>
-            <a:off x="640080" y="5212080"/>
-            <a:ext cx="8046720" cy="1051560"/>
+            <a:off x="640080" y="4232402"/>
+            <a:ext cx="8046720" cy="2031238"/>
           </a:xfrm>
           <a:prstGeom prst="rect">
             <a:avLst/>
@@ -9270,7 +9250,7 @@
           <a:p>
             <a:pPr algn="l" indent="0" marL="0">
               <a:lnSpc>
-                <a:spcPts val="2280"/>
+                <a:spcPts val="3120"/>
               </a:lnSpc>
               <a:spcAft>
                 <a:spcPts val="1010"/>
@@ -9278,7 +9258,7 @@
               <a:buNone/>
             </a:pPr>
             <a:r>
-              <a:rPr lang="en-US" sz="1900" dirty="0">
+              <a:rPr lang="en-US" sz="2600" dirty="0">
                 <a:solidFill>
                   <a:srgbClr val="111111"/>
                 </a:solidFill>
@@ -9288,12 +9268,12 @@
               </a:rPr>
               <a:t>Predict how many missing prices and how many duplicate rows the raw table has.</a:t>
             </a:r>
-            <a:endParaRPr lang="en-US" sz="1900" dirty="0"/>
-          </a:p>
-          <a:p>
-            <a:pPr algn="l" indent="0" marL="0">
-              <a:lnSpc>
-                <a:spcPts val="2280"/>
+            <a:endParaRPr lang="en-US" sz="2600" dirty="0"/>
+          </a:p>
+          <a:p>
+            <a:pPr algn="l" indent="0" marL="0">
+              <a:lnSpc>
+                <a:spcPts val="3120"/>
               </a:lnSpc>
               <a:spcAft>
                 <a:spcPts val="1010"/>
@@ -9301,7 +9281,7 @@
               <a:buNone/>
             </a:pPr>
             <a:r>
-              <a:rPr lang="en-US" sz="1900" dirty="0">
+              <a:rPr lang="en-US" sz="2600" dirty="0">
                 <a:solidFill>
                   <a:srgbClr val="111111"/>
                 </a:solidFill>
@@ -9311,7 +9291,7 @@
               </a:rPr>
               <a:t>Write your guess on paper before we run it.</a:t>
             </a:r>
-            <a:endParaRPr lang="en-US" sz="1900" dirty="0"/>
+            <a:endParaRPr lang="en-US" sz="2600" dirty="0"/>
           </a:p>
         </p:txBody>
       </p:sp>
@@ -9331,7 +9311,7 @@
         </p:blipFill>
         <p:spPr>
           <a:xfrm>
-            <a:off x="10241280" y="5214366"/>
+            <a:off x="10241280" y="5031486"/>
             <a:ext cx="1188720" cy="1046988"/>
           </a:xfrm>
           <a:prstGeom prst="rect">
